--- a/reports/flu_shot_recommendations.pptx
+++ b/reports/flu_shot_recommendations.pptx
@@ -4,6 +4,9 @@
   <p:sldMasterIdLst>
     <p:sldMasterId id="2147483648" r:id="rId1"/>
   </p:sldMasterIdLst>
+  <p:notesMasterIdLst>
+    <p:notesMasterId r:id="rId8"/>
+  </p:notesMasterIdLst>
   <p:sldIdLst>
     <p:sldId id="256" r:id="rId2"/>
     <p:sldId id="257" r:id="rId3"/>
@@ -12,10 +15,7 @@
     <p:sldId id="260" r:id="rId6"/>
     <p:sldId id="261" r:id="rId7"/>
   </p:sldIdLst>
-  <p:notesMasterIdLst>
-    <p:notesMasterId r:id="rId8"/>
-  </p:notesMasterIdLst>
-  <p:sldSz cx="9144000" cy="5143500"/>
+  <p:sldSz cx="9144000" cy="5143500" type="screen16x9"/>
   <p:notesSz cx="5143500" cy="9144000"/>
   <p:defaultTextStyle>
     <a:lvl1pPr marL="0" algn="l" defTabSz="914400" rtl="0" eaLnBrk="1" latinLnBrk="0" hangingPunct="1">
@@ -109,6 +109,11 @@
       </a:defRPr>
     </a:lvl9pPr>
   </p:defaultTextStyle>
+  <p:extLst>
+    <p:ext uri="{EFAFB233-063F-42B5-8137-9DF3F51BA10A}">
+      <p15:sldGuideLst xmlns:p15="http://schemas.microsoft.com/office/powerpoint/2012/main"/>
+    </p:ext>
+  </p:extLst>
 </p:presentation>
 </file>
 
@@ -134,234 +139,10 @@
           <a:chExt cx="0" cy="0"/>
         </a:xfrm>
       </p:grpSpPr>
-      <p:sp>
-        <p:nvSpPr>
-          <p:cNvPr id="2" name="Header Placeholder 1"/>
-          <p:cNvSpPr>
-            <a:spLocks noGrp="1"/>
-          </p:cNvSpPr>
-          <p:nvPr>
-            <p:ph type="hdr" sz="quarter"/>
-          </p:nvPr>
-        </p:nvSpPr>
-        <p:spPr>
-          <a:xfrm>
-            <a:off x="0" y="0"/>
-            <a:ext cx="2971800" cy="458788"/>
-          </a:xfrm>
-          <a:prstGeom prst="rect">
-            <a:avLst/>
-          </a:prstGeom>
-        </p:spPr>
-        <p:txBody>
-          <a:bodyPr vert="horz" lIns="91440" tIns="45720" rIns="91440" bIns="45720" rtlCol="0"/>
-          <a:lstStyle>
-            <a:lvl1pPr algn="l">
-              <a:defRPr sz="1200"/>
-            </a:lvl1pPr>
-          </a:lstStyle>
-          <a:p>
-            <a:endParaRPr lang="en-US"/>
-          </a:p>
-        </p:txBody>
-      </p:sp>
-      <p:sp>
-        <p:nvSpPr>
-          <p:cNvPr id="3" name="Date Placeholder 2"/>
-          <p:cNvSpPr>
-            <a:spLocks noGrp="1"/>
-          </p:cNvSpPr>
-          <p:nvPr>
-            <p:ph type="dt" idx="1"/>
-          </p:nvPr>
-        </p:nvSpPr>
-        <p:spPr>
-          <a:xfrm>
-            <a:off x="3884613" y="0"/>
-            <a:ext cx="2971800" cy="458788"/>
-          </a:xfrm>
-          <a:prstGeom prst="rect">
-            <a:avLst/>
-          </a:prstGeom>
-        </p:spPr>
-        <p:txBody>
-          <a:bodyPr vert="horz" lIns="91440" tIns="45720" rIns="91440" bIns="45720" rtlCol="0"/>
-          <a:lstStyle>
-            <a:lvl1pPr algn="r">
-              <a:defRPr sz="1200"/>
-            </a:lvl1pPr>
-          </a:lstStyle>
-          <a:p>
-            <a:fld id="{5282F153-3F37-0F45-9E97-73ACFA13230C}" type="datetimeFigureOut">
-              <a:rPr lang="en-US"/>
-              <a:t>7/23/19</a:t>
-            </a:fld>
-            <a:endParaRPr lang="en-US"/>
-          </a:p>
-        </p:txBody>
-      </p:sp>
-      <p:sp>
-        <p:nvSpPr>
-          <p:cNvPr id="4" name="Slide Image Placeholder 3"/>
-          <p:cNvSpPr>
-            <a:spLocks noGrp="1" noRot="1" noChangeAspect="1"/>
-          </p:cNvSpPr>
-          <p:nvPr>
-            <p:ph type="sldImg" idx="2"/>
-          </p:nvPr>
-        </p:nvSpPr>
-        <p:spPr>
-          <a:xfrm>
-            <a:off x="685800" y="1143000"/>
-            <a:ext cx="5486400" cy="3086100"/>
-          </a:xfrm>
-          <a:prstGeom prst="rect">
-            <a:avLst/>
-          </a:prstGeom>
-          <a:noFill/>
-          <a:ln w="12700">
-            <a:solidFill>
-              <a:prstClr val="black"/>
-            </a:solidFill>
-          </a:ln>
-        </p:spPr>
-        <p:txBody>
-          <a:bodyPr vert="horz" lIns="91440" tIns="45720" rIns="91440" bIns="45720" rtlCol="0" anchor="ctr"/>
-          <a:lstStyle/>
-          <a:p>
-            <a:endParaRPr lang="en-US"/>
-          </a:p>
-        </p:txBody>
-      </p:sp>
-      <p:sp>
-        <p:nvSpPr>
-          <p:cNvPr id="5" name="Notes Placeholder 4"/>
-          <p:cNvSpPr>
-            <a:spLocks noGrp="1"/>
-          </p:cNvSpPr>
-          <p:nvPr>
-            <p:ph type="body" sz="quarter" idx="3"/>
-          </p:nvPr>
-        </p:nvSpPr>
-        <p:spPr>
-          <a:xfrm>
-            <a:off x="685800" y="4400550"/>
-            <a:ext cx="5486400" cy="3600450"/>
-          </a:xfrm>
-          <a:prstGeom prst="rect">
-            <a:avLst/>
-          </a:prstGeom>
-        </p:spPr>
-        <p:txBody>
-          <a:bodyPr vert="horz" lIns="91440" tIns="45720" rIns="91440" bIns="45720" rtlCol="0"/>
-          <a:lstStyle/>
-          <a:p>
-            <a:pPr lvl="0"/>
-            <a:r>
-              <a:rPr lang="en-US"/>
-              <a:t>Click to edit Master text styles</a:t>
-            </a:r>
-          </a:p>
-          <a:p>
-            <a:pPr lvl="1"/>
-            <a:r>
-              <a:rPr lang="en-US"/>
-              <a:t>Second level</a:t>
-            </a:r>
-          </a:p>
-          <a:p>
-            <a:pPr lvl="2"/>
-            <a:r>
-              <a:rPr lang="en-US"/>
-              <a:t>Third level</a:t>
-            </a:r>
-          </a:p>
-          <a:p>
-            <a:pPr lvl="3"/>
-            <a:r>
-              <a:rPr lang="en-US"/>
-              <a:t>Fourth level</a:t>
-            </a:r>
-          </a:p>
-          <a:p>
-            <a:pPr lvl="4"/>
-            <a:r>
-              <a:rPr lang="en-US"/>
-              <a:t>Fifth level</a:t>
-            </a:r>
-          </a:p>
-        </p:txBody>
-      </p:sp>
-      <p:sp>
-        <p:nvSpPr>
-          <p:cNvPr id="6" name="Footer Placeholder 5"/>
-          <p:cNvSpPr>
-            <a:spLocks noGrp="1"/>
-          </p:cNvSpPr>
-          <p:nvPr>
-            <p:ph type="ftr" sz="quarter" idx="4"/>
-          </p:nvPr>
-        </p:nvSpPr>
-        <p:spPr>
-          <a:xfrm>
-            <a:off x="0" y="8685213"/>
-            <a:ext cx="2971800" cy="458787"/>
-          </a:xfrm>
-          <a:prstGeom prst="rect">
-            <a:avLst/>
-          </a:prstGeom>
-        </p:spPr>
-        <p:txBody>
-          <a:bodyPr vert="horz" lIns="91440" tIns="45720" rIns="91440" bIns="45720" rtlCol="0" anchor="b"/>
-          <a:lstStyle>
-            <a:lvl1pPr algn="l">
-              <a:defRPr sz="1200"/>
-            </a:lvl1pPr>
-          </a:lstStyle>
-          <a:p>
-            <a:endParaRPr lang="en-US"/>
-          </a:p>
-        </p:txBody>
-      </p:sp>
-      <p:sp>
-        <p:nvSpPr>
-          <p:cNvPr id="7" name="Slide Number Placeholder 6"/>
-          <p:cNvSpPr>
-            <a:spLocks noGrp="1"/>
-          </p:cNvSpPr>
-          <p:nvPr>
-            <p:ph type="sldNum" sz="quarter" idx="5"/>
-          </p:nvPr>
-        </p:nvSpPr>
-        <p:spPr>
-          <a:xfrm>
-            <a:off x="3884613" y="8685213"/>
-            <a:ext cx="2971800" cy="458787"/>
-          </a:xfrm>
-          <a:prstGeom prst="rect">
-            <a:avLst/>
-          </a:prstGeom>
-        </p:spPr>
-        <p:txBody>
-          <a:bodyPr vert="horz" lIns="91440" tIns="45720" rIns="91440" bIns="45720" rtlCol="0" anchor="b"/>
-          <a:lstStyle>
-            <a:lvl1pPr algn="r">
-              <a:defRPr sz="1200"/>
-            </a:lvl1pPr>
-          </a:lstStyle>
-          <a:p>
-            <a:fld id="{CE5E9CC1-C706-0F49-92D6-E571CC5EEA8F}" type="slidenum">
-              <a:rPr lang="en-US"/>
-              <a:t>‹#›</a:t>
-            </a:fld>
-            <a:endParaRPr lang="en-US"/>
-          </a:p>
-        </p:txBody>
-      </p:sp>
     </p:spTree>
     <p:extLst>
       <p:ext uri="{BB962C8B-B14F-4D97-AF65-F5344CB8AC3E}">
-        <p14:creationId xmlns:p14="http://schemas.microsoft.com/office/powerpoint/2010/main" val="1024086991"/>
+        <p14:creationId xmlns:p14="http://schemas.microsoft.com/office/powerpoint/2010/main" val="4250878857"/>
       </p:ext>
     </p:extLst>
   </p:cSld>
@@ -505,10 +286,6 @@
           <a:bodyPr/>
           <a:lstStyle/>
           <a:p>
-            <a:r>
-              <a:rPr lang="en-US" dirty="0"/>
-              <a:t/>
-            </a:r>
             <a:endParaRPr lang="en-US" dirty="0"/>
           </a:p>
         </p:txBody>
@@ -593,10 +370,6 @@
           <a:bodyPr/>
           <a:lstStyle/>
           <a:p>
-            <a:r>
-              <a:rPr lang="en-US" dirty="0"/>
-              <a:t/>
-            </a:r>
             <a:endParaRPr lang="en-US" dirty="0"/>
           </a:p>
         </p:txBody>
@@ -681,10 +454,6 @@
           <a:bodyPr/>
           <a:lstStyle/>
           <a:p>
-            <a:r>
-              <a:rPr lang="en-US" dirty="0"/>
-              <a:t/>
-            </a:r>
             <a:endParaRPr lang="en-US" dirty="0"/>
           </a:p>
         </p:txBody>
@@ -769,10 +538,6 @@
           <a:bodyPr/>
           <a:lstStyle/>
           <a:p>
-            <a:r>
-              <a:rPr lang="en-US" dirty="0"/>
-              <a:t/>
-            </a:r>
             <a:endParaRPr lang="en-US" dirty="0"/>
           </a:p>
         </p:txBody>
@@ -857,10 +622,6 @@
           <a:bodyPr/>
           <a:lstStyle/>
           <a:p>
-            <a:r>
-              <a:rPr lang="en-US" dirty="0"/>
-              <a:t/>
-            </a:r>
             <a:endParaRPr lang="en-US" dirty="0"/>
           </a:p>
         </p:txBody>
@@ -945,10 +706,6 @@
           <a:bodyPr/>
           <a:lstStyle/>
           <a:p>
-            <a:r>
-              <a:rPr lang="en-US" dirty="0"/>
-              <a:t/>
-            </a:r>
             <a:endParaRPr lang="en-US" dirty="0"/>
           </a:p>
         </p:txBody>
@@ -1022,6 +779,11 @@
 <file path=ppt/slideMasters/slideMaster1.xml><?xml version="1.0" encoding="utf-8"?>
 <p:sldMaster xmlns:a="http://schemas.openxmlformats.org/drawingml/2006/main" xmlns:r="http://schemas.openxmlformats.org/officeDocument/2006/relationships" xmlns:p="http://schemas.openxmlformats.org/presentationml/2006/main">
   <p:cSld>
+    <p:bg>
+      <p:bgRef idx="1001">
+        <a:schemeClr val="bg1"/>
+      </p:bgRef>
+    </p:bg>
     <p:spTree>
       <p:nvGrpSpPr>
         <p:cNvPr id="1" name=""/>
@@ -1304,6 +1066,7 @@
         <a:solidFill>
           <a:srgbClr val="1B2A4A"/>
         </a:solidFill>
+        <a:effectLst/>
       </p:bgPr>
     </p:bg>
     <p:spTree>
@@ -1391,7 +1154,7 @@
           <a:bodyPr wrap="square" lIns="0" tIns="0" rIns="0" bIns="0" rtlCol="0" anchor="ctr"/>
           <a:lstStyle/>
           <a:p>
-            <a:pPr algn="ctr" indent="0" marL="0">
+            <a:pPr marL="0" indent="0" algn="ctr">
               <a:buNone/>
             </a:pPr>
             <a:r>
@@ -1408,7 +1171,7 @@
             <a:endParaRPr lang="en-US" sz="3800" dirty="0"/>
           </a:p>
           <a:p>
-            <a:pPr algn="ctr" indent="0" marL="0">
+            <a:pPr marL="0" indent="0" algn="ctr">
               <a:buNone/>
             </a:pPr>
             <a:r>
@@ -1420,7 +1183,7 @@
                 <a:ea typeface="Georgia" pitchFamily="34" charset="-122"/>
                 <a:cs typeface="Georgia" pitchFamily="34" charset="-120"/>
               </a:rPr>
-              <a:t>Resources Go — and Why?</a:t>
+              <a:t>Resources Go and Why?</a:t>
             </a:r>
             <a:endParaRPr lang="en-US" sz="3800" dirty="0"/>
           </a:p>
@@ -1428,14 +1191,14 @@
       </p:sp>
       <p:sp>
         <p:nvSpPr>
-          <p:cNvPr id="5" name="Text 3"/>
-          <p:cNvSpPr/>
-          <p:nvPr/>
-        </p:nvSpPr>
-        <p:spPr>
-          <a:xfrm>
-            <a:off x="365760" y="2788920"/>
-            <a:ext cx="8412480" cy="502920"/>
+          <p:cNvPr id="6" name="Text 4"/>
+          <p:cNvSpPr/>
+          <p:nvPr/>
+        </p:nvSpPr>
+        <p:spPr>
+          <a:xfrm>
+            <a:off x="365760" y="3977640"/>
+            <a:ext cx="8412480" cy="457200"/>
           </a:xfrm>
           <a:prstGeom prst="rect">
             <a:avLst/>
@@ -1447,46 +1210,23 @@
           <a:bodyPr wrap="square" lIns="0" tIns="0" rIns="0" bIns="0" rtlCol="0" anchor="ctr"/>
           <a:lstStyle/>
           <a:p>
-            <a:pPr algn="ctr" indent="0" marL="0">
-              <a:buNone/>
-            </a:pPr>
-            <a:r>
-              <a:rPr lang="en-US" sz="1400" dirty="0">
-                <a:solidFill>
-                  <a:srgbClr val="32E0C4"/>
+            <a:pPr marL="0" indent="0" algn="ctr">
+              <a:buNone/>
+            </a:pPr>
+            <a:r>
+              <a:rPr lang="en-US" sz="1300" dirty="0">
+                <a:solidFill>
+                  <a:srgbClr val="FFFFFF"/>
                 </a:solidFill>
                 <a:latin typeface="Calibri" pitchFamily="34" charset="0"/>
                 <a:ea typeface="Calibri" pitchFamily="34" charset="-122"/>
                 <a:cs typeface="Calibri" pitchFamily="34" charset="-120"/>
               </a:rPr>
-              <a:t>Flu Shot Learning: Data-Driven Recommendations for Vaccination Campaigns</a:t>
-            </a:r>
-            <a:endParaRPr lang="en-US" sz="1400" dirty="0"/>
-          </a:p>
-        </p:txBody>
-      </p:sp>
-      <p:sp>
-        <p:nvSpPr>
-          <p:cNvPr id="6" name="Text 4"/>
-          <p:cNvSpPr/>
-          <p:nvPr/>
-        </p:nvSpPr>
-        <p:spPr>
-          <a:xfrm>
-            <a:off x="365760" y="3977640"/>
-            <a:ext cx="8412480" cy="457200"/>
-          </a:xfrm>
-          <a:prstGeom prst="rect">
-            <a:avLst/>
-          </a:prstGeom>
-          <a:noFill/>
-          <a:ln/>
-        </p:spPr>
-        <p:txBody>
-          <a:bodyPr wrap="square" lIns="0" tIns="0" rIns="0" bIns="0" rtlCol="0" anchor="ctr"/>
-          <a:lstStyle/>
-          <a:p>
-            <a:pPr algn="ctr" indent="0" marL="0">
+              <a:t>Jarret Angbazo</a:t>
+            </a:r>
+          </a:p>
+          <a:p>
+            <a:pPr marL="0" indent="0" algn="ctr">
               <a:buNone/>
             </a:pPr>
             <a:r>
@@ -1498,7 +1238,7 @@
                 <a:ea typeface="Calibri" pitchFamily="34" charset="-122"/>
                 <a:cs typeface="Calibri" pitchFamily="34" charset="-120"/>
               </a:rPr>
-              <a:t>Jarret Angbazo  |  May 2026</a:t>
+              <a:t>May 2026</a:t>
             </a:r>
             <a:endParaRPr lang="en-US" sz="1300" dirty="0"/>
           </a:p>
@@ -1520,6 +1260,7 @@
         <a:solidFill>
           <a:srgbClr val="F4F7F9"/>
         </a:solidFill>
+        <a:effectLst/>
       </p:bgPr>
     </p:bg>
     <p:spTree>
@@ -1607,7 +1348,7 @@
           <a:bodyPr wrap="square" lIns="0" tIns="0" rIns="0" bIns="0" rtlCol="0" anchor="ctr"/>
           <a:lstStyle/>
           <a:p>
-            <a:pPr indent="0" marL="0">
+            <a:pPr marL="0" indent="0">
               <a:buNone/>
             </a:pPr>
             <a:r>
@@ -1646,7 +1387,7 @@
           <a:bodyPr wrap="square" lIns="0" tIns="0" rIns="0" bIns="0" rtlCol="0" anchor="ctr"/>
           <a:lstStyle/>
           <a:p>
-            <a:pPr algn="ctr" indent="0" marL="0">
+            <a:pPr marL="0" indent="0" algn="ctr">
               <a:buNone/>
             </a:pPr>
             <a:r>
@@ -1663,7 +1404,7 @@
             <a:endParaRPr lang="en-US" sz="2000" dirty="0"/>
           </a:p>
           <a:p>
-            <a:pPr algn="ctr" indent="0" marL="0">
+            <a:pPr marL="0" indent="0" algn="ctr">
               <a:buNone/>
             </a:pPr>
             <a:r>
@@ -1675,7 +1416,7 @@
                 <a:ea typeface="Georgia" pitchFamily="34" charset="-122"/>
                 <a:cs typeface="Georgia" pitchFamily="34" charset="-120"/>
               </a:rPr>
-              <a:t>Concentrate resources on clinical workflow — not mass advertising.</a:t>
+              <a:t>Concentrate resources on clinical workflow, not mass advertising.</a:t>
             </a:r>
             <a:endParaRPr lang="en-US" sz="2000" dirty="0"/>
           </a:p>
@@ -1705,7 +1446,7 @@
             <a:prstDash val="solid"/>
           </a:ln>
           <a:effectLst>
-            <a:outerShdw sx="100000" sy="100000" kx="0" ky="0" algn="bl" rotWithShape="0" blurRad="101600" dist="38100" dir="8100000">
+            <a:outerShdw blurRad="101600" dist="38100" dir="8100000" algn="bl" rotWithShape="0">
               <a:srgbClr val="000000">
                 <a:alpha val="12000"/>
               </a:srgbClr>
@@ -1734,7 +1475,7 @@
           <a:bodyPr wrap="square" lIns="0" tIns="0" rIns="0" bIns="0" rtlCol="0" anchor="b"/>
           <a:lstStyle/>
           <a:p>
-            <a:pPr algn="ctr" indent="0" marL="0">
+            <a:pPr marL="0" indent="0" algn="ctr">
               <a:buNone/>
             </a:pPr>
             <a:r>
@@ -1773,7 +1514,7 @@
           <a:bodyPr wrap="square" lIns="0" tIns="0" rIns="0" bIns="0" rtlCol="0" anchor="ctr"/>
           <a:lstStyle/>
           <a:p>
-            <a:pPr algn="ctr" indent="0" marL="0">
+            <a:pPr marL="0" indent="0" algn="ctr">
               <a:buNone/>
             </a:pPr>
             <a:r>
@@ -1812,7 +1553,7 @@
           <a:bodyPr wrap="square" lIns="0" tIns="0" rIns="0" bIns="0" rtlCol="0" anchor="ctr"/>
           <a:lstStyle/>
           <a:p>
-            <a:pPr algn="ctr" indent="0" marL="0">
+            <a:pPr marL="0" indent="0" algn="ctr">
               <a:buNone/>
             </a:pPr>
             <a:r>
@@ -1854,7 +1595,7 @@
             <a:prstDash val="solid"/>
           </a:ln>
           <a:effectLst>
-            <a:outerShdw sx="100000" sy="100000" kx="0" ky="0" algn="bl" rotWithShape="0" blurRad="101600" dist="38100" dir="8100000">
+            <a:outerShdw blurRad="101600" dist="38100" dir="8100000" algn="bl" rotWithShape="0">
               <a:srgbClr val="000000">
                 <a:alpha val="12000"/>
               </a:srgbClr>
@@ -1883,7 +1624,7 @@
           <a:bodyPr wrap="square" lIns="0" tIns="0" rIns="0" bIns="0" rtlCol="0" anchor="b"/>
           <a:lstStyle/>
           <a:p>
-            <a:pPr algn="ctr" indent="0" marL="0">
+            <a:pPr marL="0" indent="0" algn="ctr">
               <a:buNone/>
             </a:pPr>
             <a:r>
@@ -1922,7 +1663,7 @@
           <a:bodyPr wrap="square" lIns="0" tIns="0" rIns="0" bIns="0" rtlCol="0" anchor="ctr"/>
           <a:lstStyle/>
           <a:p>
-            <a:pPr algn="ctr" indent="0" marL="0">
+            <a:pPr marL="0" indent="0" algn="ctr">
               <a:buNone/>
             </a:pPr>
             <a:r>
@@ -1961,7 +1702,7 @@
           <a:bodyPr wrap="square" lIns="0" tIns="0" rIns="0" bIns="0" rtlCol="0" anchor="ctr"/>
           <a:lstStyle/>
           <a:p>
-            <a:pPr algn="ctr" indent="0" marL="0">
+            <a:pPr marL="0" indent="0" algn="ctr">
               <a:buNone/>
             </a:pPr>
             <a:r>
@@ -2003,7 +1744,7 @@
             <a:prstDash val="solid"/>
           </a:ln>
           <a:effectLst>
-            <a:outerShdw sx="100000" sy="100000" kx="0" ky="0" algn="bl" rotWithShape="0" blurRad="101600" dist="38100" dir="8100000">
+            <a:outerShdw blurRad="101600" dist="38100" dir="8100000" algn="bl" rotWithShape="0">
               <a:srgbClr val="000000">
                 <a:alpha val="12000"/>
               </a:srgbClr>
@@ -2032,7 +1773,7 @@
           <a:bodyPr wrap="square" lIns="0" tIns="0" rIns="0" bIns="0" rtlCol="0" anchor="b"/>
           <a:lstStyle/>
           <a:p>
-            <a:pPr algn="ctr" indent="0" marL="0">
+            <a:pPr marL="0" indent="0" algn="ctr">
               <a:buNone/>
             </a:pPr>
             <a:r>
@@ -2071,7 +1812,7 @@
           <a:bodyPr wrap="square" lIns="0" tIns="0" rIns="0" bIns="0" rtlCol="0" anchor="ctr"/>
           <a:lstStyle/>
           <a:p>
-            <a:pPr algn="ctr" indent="0" marL="0">
+            <a:pPr marL="0" indent="0" algn="ctr">
               <a:buNone/>
             </a:pPr>
             <a:r>
@@ -2110,7 +1851,7 @@
           <a:bodyPr wrap="square" lIns="0" tIns="0" rIns="0" bIns="0" rtlCol="0" anchor="ctr"/>
           <a:lstStyle/>
           <a:p>
-            <a:pPr algn="ctr" indent="0" marL="0">
+            <a:pPr marL="0" indent="0" algn="ctr">
               <a:buNone/>
             </a:pPr>
             <a:r>
@@ -2144,6 +1885,7 @@
         <a:solidFill>
           <a:srgbClr val="F4F7F9"/>
         </a:solidFill>
+        <a:effectLst/>
       </p:bgPr>
     </p:bg>
     <p:spTree>
@@ -2231,7 +1973,7 @@
           <a:bodyPr wrap="square" lIns="0" tIns="0" rIns="0" bIns="0" rtlCol="0" anchor="ctr"/>
           <a:lstStyle/>
           <a:p>
-            <a:pPr indent="0" marL="0">
+            <a:pPr marL="0" indent="0">
               <a:buNone/>
             </a:pPr>
             <a:r>
@@ -2273,7 +2015,7 @@
             <a:prstDash val="solid"/>
           </a:ln>
           <a:effectLst>
-            <a:outerShdw sx="100000" sy="100000" kx="0" ky="0" algn="bl" rotWithShape="0" blurRad="76200" dist="25400" dir="8100000">
+            <a:outerShdw blurRad="76200" dist="25400" dir="8100000" algn="bl" rotWithShape="0">
               <a:srgbClr val="000000">
                 <a:alpha val="10000"/>
               </a:srgbClr>
@@ -2302,7 +2044,7 @@
           <a:bodyPr wrap="square" lIns="0" tIns="0" rIns="0" bIns="0" rtlCol="0" anchor="ctr"/>
           <a:lstStyle/>
           <a:p>
-            <a:pPr algn="ctr" indent="0" marL="0">
+            <a:pPr marL="0" indent="0" algn="ctr">
               <a:buNone/>
             </a:pPr>
             <a:r>
@@ -2341,7 +2083,7 @@
           <a:bodyPr wrap="square" lIns="0" tIns="0" rIns="0" bIns="0" rtlCol="0" anchor="ctr"/>
           <a:lstStyle/>
           <a:p>
-            <a:pPr indent="0" marL="0">
+            <a:pPr marL="0" indent="0">
               <a:buNone/>
             </a:pPr>
             <a:r>
@@ -2359,7 +2101,7 @@
             <a:endParaRPr lang="en-US" sz="1400" dirty="0"/>
           </a:p>
           <a:p>
-            <a:pPr indent="0" marL="0">
+            <a:pPr marL="0" indent="0">
               <a:buNone/>
             </a:pPr>
             <a:r>
@@ -2377,7 +2119,7 @@
             <a:endParaRPr lang="en-US" sz="1400" dirty="0"/>
           </a:p>
           <a:p>
-            <a:pPr indent="0" marL="0">
+            <a:pPr marL="0" indent="0">
               <a:buNone/>
             </a:pPr>
             <a:r>
@@ -2389,31 +2131,13 @@
                 <a:ea typeface="Calibri" pitchFamily="34" charset="-122"/>
                 <a:cs typeface="Calibri" pitchFamily="34" charset="-120"/>
               </a:rPr>
-              <a:t>Reaches people who
+              <a:t>Reaches people who would have vaccinated anyway
 </a:t>
             </a:r>
             <a:endParaRPr lang="en-US" sz="1400" dirty="0"/>
           </a:p>
           <a:p>
-            <a:pPr indent="0" marL="0">
-              <a:buNone/>
-            </a:pPr>
-            <a:r>
-              <a:rPr lang="en-US" sz="1400" dirty="0">
-                <a:solidFill>
-                  <a:srgbClr val="1E293B"/>
-                </a:solidFill>
-                <a:latin typeface="Calibri" pitchFamily="34" charset="0"/>
-                <a:ea typeface="Calibri" pitchFamily="34" charset="-122"/>
-                <a:cs typeface="Calibri" pitchFamily="34" charset="-120"/>
-              </a:rPr>
-              <a:t>would have vaccinated anyway
-</a:t>
-            </a:r>
-            <a:endParaRPr lang="en-US" sz="1400" dirty="0"/>
-          </a:p>
-          <a:p>
-            <a:pPr indent="0" marL="0">
+            <a:pPr marL="0" indent="0">
               <a:buNone/>
             </a:pPr>
             <a:r>
@@ -2455,7 +2179,7 @@
             <a:prstDash val="solid"/>
           </a:ln>
           <a:effectLst>
-            <a:outerShdw sx="100000" sy="100000" kx="0" ky="0" algn="bl" rotWithShape="0" blurRad="76200" dist="25400" dir="8100000">
+            <a:outerShdw blurRad="76200" dist="25400" dir="8100000" algn="bl" rotWithShape="0">
               <a:srgbClr val="000000">
                 <a:alpha val="10000"/>
               </a:srgbClr>
@@ -2484,7 +2208,7 @@
           <a:bodyPr wrap="square" lIns="0" tIns="0" rIns="0" bIns="0" rtlCol="0" anchor="ctr"/>
           <a:lstStyle/>
           <a:p>
-            <a:pPr algn="ctr" indent="0" marL="0">
+            <a:pPr marL="0" indent="0" algn="ctr">
               <a:buNone/>
             </a:pPr>
             <a:r>
@@ -2523,7 +2247,7 @@
           <a:bodyPr wrap="square" lIns="0" tIns="0" rIns="0" bIns="0" rtlCol="0" anchor="ctr"/>
           <a:lstStyle/>
           <a:p>
-            <a:pPr indent="0" marL="0">
+            <a:pPr marL="0" indent="0">
               <a:buNone/>
             </a:pPr>
             <a:r>
@@ -2541,7 +2265,7 @@
             <a:endParaRPr lang="en-US" sz="1400" dirty="0"/>
           </a:p>
           <a:p>
-            <a:pPr indent="0" marL="0">
+            <a:pPr marL="0" indent="0">
               <a:buNone/>
             </a:pPr>
             <a:r>
@@ -2559,7 +2283,7 @@
             <a:endParaRPr lang="en-US" sz="1400" dirty="0"/>
           </a:p>
           <a:p>
-            <a:pPr indent="0" marL="0">
+            <a:pPr marL="0" indent="0">
               <a:buNone/>
             </a:pPr>
             <a:r>
@@ -2571,31 +2295,13 @@
                 <a:ea typeface="Calibri" pitchFamily="34" charset="-122"/>
                 <a:cs typeface="Calibri" pitchFamily="34" charset="-120"/>
               </a:rPr>
-              <a:t>Physician-driven outreach
+              <a:t>Physician-driven outreach for highest-risk patients
 </a:t>
             </a:r>
             <a:endParaRPr lang="en-US" sz="1400" dirty="0"/>
           </a:p>
           <a:p>
-            <a:pPr indent="0" marL="0">
-              <a:buNone/>
-            </a:pPr>
-            <a:r>
-              <a:rPr lang="en-US" sz="1400" dirty="0">
-                <a:solidFill>
-                  <a:srgbClr val="FFFFFF"/>
-                </a:solidFill>
-                <a:latin typeface="Calibri" pitchFamily="34" charset="0"/>
-                <a:ea typeface="Calibri" pitchFamily="34" charset="-122"/>
-                <a:cs typeface="Calibri" pitchFamily="34" charset="-120"/>
-              </a:rPr>
-              <a:t>for highest-risk patients
-</a:t>
-            </a:r>
-            <a:endParaRPr lang="en-US" sz="1400" dirty="0"/>
-          </a:p>
-          <a:p>
-            <a:pPr indent="0" marL="0">
+            <a:pPr marL="0" indent="0">
               <a:buNone/>
             </a:pPr>
             <a:r>
@@ -2659,7 +2365,7 @@
           <a:bodyPr wrap="square" lIns="0" tIns="0" rIns="0" bIns="0" rtlCol="0" anchor="ctr"/>
           <a:lstStyle/>
           <a:p>
-            <a:pPr algn="ctr" indent="0" marL="0">
+            <a:pPr marL="0" indent="0" algn="ctr">
               <a:buNone/>
             </a:pPr>
             <a:r>
@@ -2693,6 +2399,7 @@
         <a:solidFill>
           <a:srgbClr val="F4F7F9"/>
         </a:solidFill>
+        <a:effectLst/>
       </p:bgPr>
     </p:bg>
     <p:spTree>
@@ -2780,7 +2487,7 @@
           <a:bodyPr wrap="square" lIns="0" tIns="0" rIns="0" bIns="0" rtlCol="0" anchor="ctr"/>
           <a:lstStyle/>
           <a:p>
-            <a:pPr indent="0" marL="0">
+            <a:pPr marL="0" indent="0">
               <a:buNone/>
             </a:pPr>
             <a:r>
@@ -2819,7 +2526,7 @@
           <a:bodyPr wrap="square" lIns="0" tIns="0" rIns="0" bIns="0" rtlCol="0" anchor="ctr"/>
           <a:lstStyle/>
           <a:p>
-            <a:pPr algn="r" indent="0" marL="0">
+            <a:pPr marL="0" indent="0" algn="r">
               <a:buNone/>
             </a:pPr>
             <a:r>
@@ -2908,7 +2615,7 @@
           <a:bodyPr wrap="square" lIns="0" tIns="0" rIns="0" bIns="0" rtlCol="0" anchor="ctr"/>
           <a:lstStyle/>
           <a:p>
-            <a:pPr indent="0" marL="0">
+            <a:pPr marL="0" indent="0">
               <a:buNone/>
             </a:pPr>
             <a:r>
@@ -2947,7 +2654,7 @@
           <a:bodyPr wrap="square" lIns="0" tIns="0" rIns="0" bIns="0" rtlCol="0" anchor="ctr"/>
           <a:lstStyle/>
           <a:p>
-            <a:pPr algn="r" indent="0" marL="0">
+            <a:pPr marL="0" indent="0" algn="r">
               <a:buNone/>
             </a:pPr>
             <a:r>
@@ -3036,7 +2743,7 @@
           <a:bodyPr wrap="square" lIns="0" tIns="0" rIns="0" bIns="0" rtlCol="0" anchor="ctr"/>
           <a:lstStyle/>
           <a:p>
-            <a:pPr algn="r" indent="0" marL="0">
+            <a:pPr marL="0" indent="0" algn="r">
               <a:buNone/>
             </a:pPr>
             <a:r>
@@ -3125,7 +2832,7 @@
           <a:bodyPr wrap="square" lIns="0" tIns="0" rIns="0" bIns="0" rtlCol="0" anchor="ctr"/>
           <a:lstStyle/>
           <a:p>
-            <a:pPr algn="r" indent="0" marL="0">
+            <a:pPr marL="0" indent="0" algn="r">
               <a:buNone/>
             </a:pPr>
             <a:r>
@@ -3214,7 +2921,7 @@
           <a:bodyPr wrap="square" lIns="0" tIns="0" rIns="0" bIns="0" rtlCol="0" anchor="ctr"/>
           <a:lstStyle/>
           <a:p>
-            <a:pPr algn="r" indent="0" marL="0">
+            <a:pPr marL="0" indent="0" algn="r">
               <a:buNone/>
             </a:pPr>
             <a:r>
@@ -3303,7 +3010,7 @@
           <a:bodyPr wrap="square" lIns="0" tIns="0" rIns="0" bIns="0" rtlCol="0" anchor="ctr"/>
           <a:lstStyle/>
           <a:p>
-            <a:pPr algn="r" indent="0" marL="0">
+            <a:pPr marL="0" indent="0" algn="r">
               <a:buNone/>
             </a:pPr>
             <a:r>
@@ -3417,7 +3124,7 @@
           <a:bodyPr wrap="square" lIns="0" tIns="0" rIns="0" bIns="0" rtlCol="0" anchor="ctr"/>
           <a:lstStyle/>
           <a:p>
-            <a:pPr indent="0" marL="0">
+            <a:pPr marL="0" indent="0">
               <a:buNone/>
             </a:pPr>
             <a:r>
@@ -3481,7 +3188,7 @@
           <a:bodyPr wrap="square" lIns="0" tIns="0" rIns="0" bIns="0" rtlCol="0" anchor="ctr"/>
           <a:lstStyle/>
           <a:p>
-            <a:pPr indent="0" marL="0">
+            <a:pPr marL="0" indent="0">
               <a:buNone/>
             </a:pPr>
             <a:r>
@@ -3545,7 +3252,7 @@
           <a:bodyPr wrap="square" lIns="0" tIns="0" rIns="0" bIns="0" rtlCol="0" anchor="ctr"/>
           <a:lstStyle/>
           <a:p>
-            <a:pPr indent="0" marL="0">
+            <a:pPr marL="0" indent="0">
               <a:buNone/>
             </a:pPr>
             <a:r>
@@ -3579,6 +3286,7 @@
         <a:solidFill>
           <a:srgbClr val="F4F7F9"/>
         </a:solidFill>
+        <a:effectLst/>
       </p:bgPr>
     </p:bg>
     <p:spTree>
@@ -3666,7 +3374,7 @@
           <a:bodyPr wrap="square" lIns="0" tIns="0" rIns="0" bIns="0" rtlCol="0" anchor="ctr"/>
           <a:lstStyle/>
           <a:p>
-            <a:pPr indent="0" marL="0">
+            <a:pPr marL="0" indent="0">
               <a:buNone/>
             </a:pPr>
             <a:r>
@@ -3730,7 +3438,7 @@
           <a:bodyPr wrap="square" lIns="0" tIns="0" rIns="0" bIns="0" rtlCol="0" anchor="ctr"/>
           <a:lstStyle/>
           <a:p>
-            <a:pPr algn="ctr" indent="0" marL="0">
+            <a:pPr marL="0" indent="0" algn="ctr">
               <a:buNone/>
             </a:pPr>
             <a:r>
@@ -3769,7 +3477,7 @@
           <a:bodyPr wrap="square" lIns="0" tIns="0" rIns="0" bIns="0" rtlCol="0" anchor="ctr"/>
           <a:lstStyle/>
           <a:p>
-            <a:pPr indent="0" marL="0">
+            <a:pPr marL="0" indent="0">
               <a:buNone/>
             </a:pPr>
             <a:r>
@@ -3808,7 +3516,7 @@
           <a:bodyPr wrap="square" lIns="0" tIns="0" rIns="0" bIns="0" rtlCol="0" anchor="ctr"/>
           <a:lstStyle/>
           <a:p>
-            <a:pPr indent="0" marL="0">
+            <a:pPr marL="0" indent="0">
               <a:buNone/>
             </a:pPr>
             <a:r>
@@ -3872,7 +3580,7 @@
           <a:bodyPr wrap="square" lIns="0" tIns="0" rIns="0" bIns="0" rtlCol="0" anchor="ctr"/>
           <a:lstStyle/>
           <a:p>
-            <a:pPr algn="ctr" indent="0" marL="0">
+            <a:pPr marL="0" indent="0" algn="ctr">
               <a:buNone/>
             </a:pPr>
             <a:r>
@@ -3911,7 +3619,7 @@
           <a:bodyPr wrap="square" lIns="0" tIns="0" rIns="0" bIns="0" rtlCol="0" anchor="ctr"/>
           <a:lstStyle/>
           <a:p>
-            <a:pPr indent="0" marL="0">
+            <a:pPr marL="0" indent="0">
               <a:buNone/>
             </a:pPr>
             <a:r>
@@ -3950,7 +3658,7 @@
           <a:bodyPr wrap="square" lIns="0" tIns="0" rIns="0" bIns="0" rtlCol="0" anchor="ctr"/>
           <a:lstStyle/>
           <a:p>
-            <a:pPr indent="0" marL="0">
+            <a:pPr marL="0" indent="0">
               <a:buNone/>
             </a:pPr>
             <a:r>
@@ -3962,7 +3670,7 @@
                 <a:ea typeface="Calibri" pitchFamily="34" charset="-122"/>
                 <a:cs typeface="Calibri" pitchFamily="34" charset="-120"/>
               </a:rPr>
-              <a:t>The second tier of non-vaccinators are skeptical about efficacy and personal risk — not about access. Credible, physician-endorsed messaging about what vaccines do reaches this group. Generic awareness campaigns will not.</a:t>
+              <a:t>The second tier of non-vaccinators are skeptical about efficacy and personal risk, not about access. Credible, physician-endorsed messaging about what vaccines do reaches this group. Generic awareness campaigns will not.</a:t>
             </a:r>
             <a:endParaRPr lang="en-US" sz="1100" dirty="0"/>
           </a:p>
@@ -4014,7 +3722,7 @@
           <a:bodyPr wrap="square" lIns="0" tIns="0" rIns="0" bIns="0" rtlCol="0" anchor="ctr"/>
           <a:lstStyle/>
           <a:p>
-            <a:pPr algn="ctr" indent="0" marL="0">
+            <a:pPr marL="0" indent="0" algn="ctr">
               <a:buNone/>
             </a:pPr>
             <a:r>
@@ -4053,7 +3761,7 @@
           <a:bodyPr wrap="square" lIns="0" tIns="0" rIns="0" bIns="0" rtlCol="0" anchor="ctr"/>
           <a:lstStyle/>
           <a:p>
-            <a:pPr indent="0" marL="0">
+            <a:pPr marL="0" indent="0">
               <a:buNone/>
             </a:pPr>
             <a:r>
@@ -4092,7 +3800,7 @@
           <a:bodyPr wrap="square" lIns="0" tIns="0" rIns="0" bIns="0" rtlCol="0" anchor="ctr"/>
           <a:lstStyle/>
           <a:p>
-            <a:pPr indent="0" marL="0">
+            <a:pPr marL="0" indent="0">
               <a:buNone/>
             </a:pPr>
             <a:r>
@@ -4156,7 +3864,7 @@
           <a:bodyPr wrap="square" lIns="0" tIns="0" rIns="0" bIns="0" rtlCol="0" anchor="ctr"/>
           <a:lstStyle/>
           <a:p>
-            <a:pPr indent="0" marL="0">
+            <a:pPr marL="0" indent="0">
               <a:buNone/>
             </a:pPr>
             <a:r>
@@ -4190,6 +3898,7 @@
         <a:solidFill>
           <a:srgbClr val="1B2A4A"/>
         </a:solidFill>
+        <a:effectLst/>
       </p:bgPr>
     </p:bg>
     <p:spTree>
@@ -4252,7 +3961,7 @@
           <a:bodyPr wrap="square" lIns="0" tIns="0" rIns="0" bIns="0" rtlCol="0" anchor="ctr"/>
           <a:lstStyle/>
           <a:p>
-            <a:pPr algn="ctr" indent="0" marL="0">
+            <a:pPr marL="0" indent="0" algn="ctr">
               <a:buNone/>
             </a:pPr>
             <a:r>
@@ -4291,7 +4000,7 @@
           <a:bodyPr wrap="square" lIns="0" tIns="0" rIns="0" bIns="0" rtlCol="0" anchor="ctr"/>
           <a:lstStyle/>
           <a:p>
-            <a:pPr algn="ctr" indent="0" marL="0">
+            <a:pPr marL="0" indent="0" algn="ctr">
               <a:buNone/>
             </a:pPr>
             <a:r>
@@ -4308,7 +4017,7 @@
             <a:endParaRPr lang="en-US" sz="1600" dirty="0"/>
           </a:p>
           <a:p>
-            <a:pPr algn="ctr" indent="0" marL="0">
+            <a:pPr marL="0" indent="0" algn="ctr">
               <a:buNone/>
             </a:pPr>
             <a:r>
@@ -4347,7 +4056,7 @@
           <a:bodyPr wrap="square" lIns="0" tIns="0" rIns="0" bIns="0" rtlCol="0" anchor="ctr"/>
           <a:lstStyle/>
           <a:p>
-            <a:pPr algn="ctr" indent="0" marL="0">
+            <a:pPr marL="0" indent="0" algn="ctr">
               <a:buNone/>
             </a:pPr>
             <a:r>
@@ -4666,4 +4375,299 @@
     </a:ext>
   </a:extLst>
 </a:theme>
+</file>
+
+<file path=ppt/theme/theme2.xml><?xml version="1.0" encoding="utf-8"?>
+<a:theme xmlns:a="http://schemas.openxmlformats.org/drawingml/2006/main" name="Office Theme">
+  <a:themeElements>
+    <a:clrScheme name="Office">
+      <a:dk1>
+        <a:sysClr val="windowText" lastClr="000000"/>
+      </a:dk1>
+      <a:lt1>
+        <a:sysClr val="window" lastClr="FFFFFF"/>
+      </a:lt1>
+      <a:dk2>
+        <a:srgbClr val="44546A"/>
+      </a:dk2>
+      <a:lt2>
+        <a:srgbClr val="E7E6E6"/>
+      </a:lt2>
+      <a:accent1>
+        <a:srgbClr val="4472C4"/>
+      </a:accent1>
+      <a:accent2>
+        <a:srgbClr val="ED7D31"/>
+      </a:accent2>
+      <a:accent3>
+        <a:srgbClr val="A5A5A5"/>
+      </a:accent3>
+      <a:accent4>
+        <a:srgbClr val="FFC000"/>
+      </a:accent4>
+      <a:accent5>
+        <a:srgbClr val="5B9BD5"/>
+      </a:accent5>
+      <a:accent6>
+        <a:srgbClr val="70AD47"/>
+      </a:accent6>
+      <a:hlink>
+        <a:srgbClr val="0563C1"/>
+      </a:hlink>
+      <a:folHlink>
+        <a:srgbClr val="954F72"/>
+      </a:folHlink>
+    </a:clrScheme>
+    <a:fontScheme name="Office">
+      <a:majorFont>
+        <a:latin typeface="Calibri Light" panose="020F0302020204030204"/>
+        <a:ea typeface=""/>
+        <a:cs typeface=""/>
+        <a:font script="Jpan" typeface="游ゴシック Light"/>
+        <a:font script="Hang" typeface="맑은 고딕"/>
+        <a:font script="Hans" typeface="等线 Light"/>
+        <a:font script="Hant" typeface="新細明體"/>
+        <a:font script="Arab" typeface="Times New Roman"/>
+        <a:font script="Hebr" typeface="Times New Roman"/>
+        <a:font script="Thai" typeface="Angsana New"/>
+        <a:font script="Ethi" typeface="Nyala"/>
+        <a:font script="Beng" typeface="Vrinda"/>
+        <a:font script="Gujr" typeface="Shruti"/>
+        <a:font script="Khmr" typeface="MoolBoran"/>
+        <a:font script="Knda" typeface="Tunga"/>
+        <a:font script="Guru" typeface="Raavi"/>
+        <a:font script="Cans" typeface="Euphemia"/>
+        <a:font script="Cher" typeface="Plantagenet Cherokee"/>
+        <a:font script="Yiii" typeface="Microsoft Yi Baiti"/>
+        <a:font script="Tibt" typeface="Microsoft Himalaya"/>
+        <a:font script="Thaa" typeface="MV Boli"/>
+        <a:font script="Deva" typeface="Mangal"/>
+        <a:font script="Telu" typeface="Gautami"/>
+        <a:font script="Taml" typeface="Latha"/>
+        <a:font script="Syrc" typeface="Estrangelo Edessa"/>
+        <a:font script="Orya" typeface="Kalinga"/>
+        <a:font script="Mlym" typeface="Kartika"/>
+        <a:font script="Laoo" typeface="DokChampa"/>
+        <a:font script="Sinh" typeface="Iskoola Pota"/>
+        <a:font script="Mong" typeface="Mongolian Baiti"/>
+        <a:font script="Viet" typeface="Times New Roman"/>
+        <a:font script="Uigh" typeface="Microsoft Uighur"/>
+        <a:font script="Geor" typeface="Sylfaen"/>
+        <a:font script="Armn" typeface="Arial"/>
+        <a:font script="Bugi" typeface="Leelawadee UI"/>
+        <a:font script="Bopo" typeface="Microsoft JhengHei"/>
+        <a:font script="Java" typeface="Javanese Text"/>
+        <a:font script="Lisu" typeface="Segoe UI"/>
+        <a:font script="Mymr" typeface="Myanmar Text"/>
+        <a:font script="Nkoo" typeface="Ebrima"/>
+        <a:font script="Olck" typeface="Nirmala UI"/>
+        <a:font script="Osma" typeface="Ebrima"/>
+        <a:font script="Phag" typeface="Phagspa"/>
+        <a:font script="Syrn" typeface="Estrangelo Edessa"/>
+        <a:font script="Syrj" typeface="Estrangelo Edessa"/>
+        <a:font script="Syre" typeface="Estrangelo Edessa"/>
+        <a:font script="Sora" typeface="Nirmala UI"/>
+        <a:font script="Tale" typeface="Microsoft Tai Le"/>
+        <a:font script="Talu" typeface="Microsoft New Tai Lue"/>
+        <a:font script="Tfng" typeface="Ebrima"/>
+      </a:majorFont>
+      <a:minorFont>
+        <a:latin typeface="Calibri" panose="020F0502020204030204"/>
+        <a:ea typeface=""/>
+        <a:cs typeface=""/>
+        <a:font script="Jpan" typeface="游ゴシック"/>
+        <a:font script="Hang" typeface="맑은 고딕"/>
+        <a:font script="Hans" typeface="等线"/>
+        <a:font script="Hant" typeface="新細明體"/>
+        <a:font script="Arab" typeface="Arial"/>
+        <a:font script="Hebr" typeface="Arial"/>
+        <a:font script="Thai" typeface="Cordia New"/>
+        <a:font script="Ethi" typeface="Nyala"/>
+        <a:font script="Beng" typeface="Vrinda"/>
+        <a:font script="Gujr" typeface="Shruti"/>
+        <a:font script="Khmr" typeface="DaunPenh"/>
+        <a:font script="Knda" typeface="Tunga"/>
+        <a:font script="Guru" typeface="Raavi"/>
+        <a:font script="Cans" typeface="Euphemia"/>
+        <a:font script="Cher" typeface="Plantagenet Cherokee"/>
+        <a:font script="Yiii" typeface="Microsoft Yi Baiti"/>
+        <a:font script="Tibt" typeface="Microsoft Himalaya"/>
+        <a:font script="Thaa" typeface="MV Boli"/>
+        <a:font script="Deva" typeface="Mangal"/>
+        <a:font script="Telu" typeface="Gautami"/>
+        <a:font script="Taml" typeface="Latha"/>
+        <a:font script="Syrc" typeface="Estrangelo Edessa"/>
+        <a:font script="Orya" typeface="Kalinga"/>
+        <a:font script="Mlym" typeface="Kartika"/>
+        <a:font script="Laoo" typeface="DokChampa"/>
+        <a:font script="Sinh" typeface="Iskoola Pota"/>
+        <a:font script="Mong" typeface="Mongolian Baiti"/>
+        <a:font script="Viet" typeface="Arial"/>
+        <a:font script="Uigh" typeface="Microsoft Uighur"/>
+        <a:font script="Geor" typeface="Sylfaen"/>
+        <a:font script="Armn" typeface="Arial"/>
+        <a:font script="Bugi" typeface="Leelawadee UI"/>
+        <a:font script="Bopo" typeface="Microsoft JhengHei"/>
+        <a:font script="Java" typeface="Javanese Text"/>
+        <a:font script="Lisu" typeface="Segoe UI"/>
+        <a:font script="Mymr" typeface="Myanmar Text"/>
+        <a:font script="Nkoo" typeface="Ebrima"/>
+        <a:font script="Olck" typeface="Nirmala UI"/>
+        <a:font script="Osma" typeface="Ebrima"/>
+        <a:font script="Phag" typeface="Phagspa"/>
+        <a:font script="Syrn" typeface="Estrangelo Edessa"/>
+        <a:font script="Syrj" typeface="Estrangelo Edessa"/>
+        <a:font script="Syre" typeface="Estrangelo Edessa"/>
+        <a:font script="Sora" typeface="Nirmala UI"/>
+        <a:font script="Tale" typeface="Microsoft Tai Le"/>
+        <a:font script="Talu" typeface="Microsoft New Tai Lue"/>
+        <a:font script="Tfng" typeface="Ebrima"/>
+      </a:minorFont>
+    </a:fontScheme>
+    <a:fmtScheme name="Office">
+      <a:fillStyleLst>
+        <a:solidFill>
+          <a:schemeClr val="phClr"/>
+        </a:solidFill>
+        <a:gradFill rotWithShape="1">
+          <a:gsLst>
+            <a:gs pos="0">
+              <a:schemeClr val="phClr">
+                <a:lumMod val="110000"/>
+                <a:satMod val="105000"/>
+                <a:tint val="67000"/>
+              </a:schemeClr>
+            </a:gs>
+            <a:gs pos="50000">
+              <a:schemeClr val="phClr">
+                <a:lumMod val="105000"/>
+                <a:satMod val="103000"/>
+                <a:tint val="73000"/>
+              </a:schemeClr>
+            </a:gs>
+            <a:gs pos="100000">
+              <a:schemeClr val="phClr">
+                <a:lumMod val="105000"/>
+                <a:satMod val="109000"/>
+                <a:tint val="81000"/>
+              </a:schemeClr>
+            </a:gs>
+          </a:gsLst>
+          <a:lin ang="5400000" scaled="0"/>
+        </a:gradFill>
+        <a:gradFill rotWithShape="1">
+          <a:gsLst>
+            <a:gs pos="0">
+              <a:schemeClr val="phClr">
+                <a:satMod val="103000"/>
+                <a:lumMod val="102000"/>
+                <a:tint val="94000"/>
+              </a:schemeClr>
+            </a:gs>
+            <a:gs pos="50000">
+              <a:schemeClr val="phClr">
+                <a:satMod val="110000"/>
+                <a:lumMod val="100000"/>
+                <a:shade val="100000"/>
+              </a:schemeClr>
+            </a:gs>
+            <a:gs pos="100000">
+              <a:schemeClr val="phClr">
+                <a:lumMod val="99000"/>
+                <a:satMod val="120000"/>
+                <a:shade val="78000"/>
+              </a:schemeClr>
+            </a:gs>
+          </a:gsLst>
+          <a:lin ang="5400000" scaled="0"/>
+        </a:gradFill>
+      </a:fillStyleLst>
+      <a:lnStyleLst>
+        <a:ln w="6350" cap="flat" cmpd="sng" algn="ctr">
+          <a:solidFill>
+            <a:schemeClr val="phClr"/>
+          </a:solidFill>
+          <a:prstDash val="solid"/>
+          <a:miter lim="800000"/>
+        </a:ln>
+        <a:ln w="12700" cap="flat" cmpd="sng" algn="ctr">
+          <a:solidFill>
+            <a:schemeClr val="phClr"/>
+          </a:solidFill>
+          <a:prstDash val="solid"/>
+          <a:miter lim="800000"/>
+        </a:ln>
+        <a:ln w="19050" cap="flat" cmpd="sng" algn="ctr">
+          <a:solidFill>
+            <a:schemeClr val="phClr"/>
+          </a:solidFill>
+          <a:prstDash val="solid"/>
+          <a:miter lim="800000"/>
+        </a:ln>
+      </a:lnStyleLst>
+      <a:effectStyleLst>
+        <a:effectStyle>
+          <a:effectLst/>
+        </a:effectStyle>
+        <a:effectStyle>
+          <a:effectLst/>
+        </a:effectStyle>
+        <a:effectStyle>
+          <a:effectLst>
+            <a:outerShdw blurRad="57150" dist="19050" dir="5400000" algn="ctr" rotWithShape="0">
+              <a:srgbClr val="000000">
+                <a:alpha val="63000"/>
+              </a:srgbClr>
+            </a:outerShdw>
+          </a:effectLst>
+        </a:effectStyle>
+      </a:effectStyleLst>
+      <a:bgFillStyleLst>
+        <a:solidFill>
+          <a:schemeClr val="phClr"/>
+        </a:solidFill>
+        <a:solidFill>
+          <a:schemeClr val="phClr">
+            <a:tint val="95000"/>
+            <a:satMod val="170000"/>
+          </a:schemeClr>
+        </a:solidFill>
+        <a:gradFill rotWithShape="1">
+          <a:gsLst>
+            <a:gs pos="0">
+              <a:schemeClr val="phClr">
+                <a:tint val="93000"/>
+                <a:satMod val="150000"/>
+                <a:shade val="98000"/>
+                <a:lumMod val="102000"/>
+              </a:schemeClr>
+            </a:gs>
+            <a:gs pos="50000">
+              <a:schemeClr val="phClr">
+                <a:tint val="98000"/>
+                <a:satMod val="130000"/>
+                <a:shade val="90000"/>
+                <a:lumMod val="103000"/>
+              </a:schemeClr>
+            </a:gs>
+            <a:gs pos="100000">
+              <a:schemeClr val="phClr">
+                <a:shade val="63000"/>
+                <a:satMod val="120000"/>
+              </a:schemeClr>
+            </a:gs>
+          </a:gsLst>
+          <a:lin ang="5400000" scaled="0"/>
+        </a:gradFill>
+      </a:bgFillStyleLst>
+    </a:fmtScheme>
+  </a:themeElements>
+  <a:objectDefaults/>
+  <a:extraClrSchemeLst/>
+  <a:extLst>
+    <a:ext uri="{05A4C25C-085E-4340-85A3-A5531E510DB2}">
+      <thm15:themeFamily xmlns:thm15="http://schemas.microsoft.com/office/thememl/2012/main" name="Office Theme" id="{62F939B6-93AF-4DB8-9C6B-D6C7DFDC589F}" vid="{4A3C46E8-61CC-4603-A589-7422A47A8E4A}"/>
+    </a:ext>
+  </a:extLst>
+</a:theme>
 </file>